--- a/slides/chungshan-elem-sdg11-cities/chungshan-elem-sdg11-cities.pptx
+++ b/slides/chungshan-elem-sdg11-cities/chungshan-elem-sdg11-cities.pptx
@@ -3705,7 +3705,9 @@
       <p:grpSpPr/>
       <p:pic>
         <p:nvPicPr>
-          <p:cNvPr id="2" name="Picture 1" descr="021.jpg"/>
+          <p:cNvPr id="2" name="Picture 1" descr="021.jpg">
+            <a:hlinkClick r:id="rId3"/>
+          </p:cNvPr>
           <p:cNvPicPr>
             <a:picLocks noChangeAspect="1"/>
           </p:cNvPicPr>
